--- a/presentations/AI_Accelerators_2hr_lecture.pptx
+++ b/presentations/AI_Accelerators_2hr_lecture.pptx
@@ -552,7 +552,7 @@
           <a:p>
             <a:r>
               <a:rPr lang="en-US" dirty="0"/>
-              <a:t/>
+              <a:t>Full lecture version. Same thesis as the short talk but with the mechanisms shown. Tell the audience: we build a repeatable test, then read the whole landscape through it. Pace: ~7 movements, keep each family to a few minutes.</a:t>
             </a:r>
             <a:endParaRPr lang="en-US" dirty="0"/>
           </a:p>
@@ -640,7 +640,7 @@
           <a:p>
             <a:r>
               <a:rPr lang="en-US" dirty="0"/>
-              <a:t/>
+              <a:t>The GPU is efficient when work has: parallelism, coalesced access, lane regularity, occupancy, batchability, amortized overhead. As each becomes narrow/irregular/latency-bound, useful utilization falls. NOT "GPUs can't do X" — it's a continuum. The leak region is exactly where specialists compete. This frames the whole families section.</a:t>
             </a:r>
             <a:endParaRPr lang="en-US" dirty="0"/>
           </a:p>
@@ -728,7 +728,7 @@
           <a:p>
             <a:r>
               <a:rPr lang="en-US" dirty="0"/>
-              <a:t/>
+              <a:t>Section 2 goal: turn "AI workloads" into MEASURED signatures and bounds. These are the numbers the necessity test consumes later.</a:t>
             </a:r>
             <a:endParaRPr lang="en-US" dirty="0"/>
           </a:p>
@@ -816,7 +816,7 @@
           <a:p>
             <a:r>
               <a:rPr lang="en-US" dirty="0"/>
-              <a:t/>
+              <a:t>Method note: don't reason from model NAMES; reason from signatures — arithmetic intensity, locality, parallelism, regularity, batchability, deadline. The same request is compute-bound in prefill and bandwidth-bound in decode. Signatures are what map onto contracts.</a:t>
             </a:r>
             <a:endParaRPr lang="en-US" dirty="0"/>
           </a:p>
@@ -904,7 +904,7 @@
           <a:p>
             <a:r>
               <a:rPr lang="en-US" dirty="0"/>
-              <a:t/>
+              <a:t>Transformer inference has two phases. Prefill = process the prompt, compute-bound, high arithmetic intensity, parallel. Decode = one token at a time, bandwidth-bound (must stream weights). A single device compromises; that's why "disaggregated" serving and even phase-split silicon (reported TPU-8) are appearing.</a:t>
             </a:r>
             <a:endParaRPr lang="en-US" dirty="0"/>
           </a:p>
@@ -992,7 +992,7 @@
           <a:p>
             <a:r>
               <a:rPr lang="en-US" dirty="0"/>
-              <a:t/>
+              <a:t>Keystone number. One sequence → stream ~70 GB weights/token; at ~3.35 TB/s → ~48 tok/s, ~0.3% of matrix throughput. Author-computed from datasheets; idealized. Only batching (amortize weight reads) or a changed memory contract helps — adding FLOPS does nothing. This is WHY silicon is going memory-first and inference-first.</a:t>
             </a:r>
             <a:endParaRPr lang="en-US" dirty="0"/>
           </a:p>
@@ -1080,7 +1080,7 @@
           <a:p>
             <a:r>
               <a:rPr lang="en-US" dirty="0"/>
-              <a:t/>
+              <a:t>Wake scope = which power domains must wake to answer. ~4 orders: µW always-on to W cloud round-trip. An always-on feature is IMPOSSIBLE within a battery budget on a GPU's submission/memory model — structural, not a tuning gap. Strongest beyond-GPU territory; returns at the NPU slide.</a:t>
             </a:r>
             <a:endParaRPr lang="en-US" dirty="0"/>
           </a:p>
@@ -1168,7 +1168,7 @@
           <a:p>
             <a:r>
               <a:rPr lang="en-US" dirty="0"/>
-              <a:t/>
+              <a:t>Mixture-of-experts routes tokens to experts on different devices; all-to-all can be ~1/3 of a step. As models get sparser, the bottleneck moves to the NETWORK — which is why interconnect (NVLink/UALink/Ethernet) becomes a competitive axis in the landscape and packaging sections.</a:t>
             </a:r>
             <a:endParaRPr lang="en-US" dirty="0"/>
           </a:p>
@@ -1256,7 +1256,7 @@
           <a:p>
             <a:r>
               <a:rPr lang="en-US" dirty="0"/>
-              <a:t/>
+              <a:t>Dense tiles are contiguous, reused, prefetchable. Irregular gather (embeddings, graphs, dynamic sparsity) fetches one useful word per cache line from scattered addresses and evicts before reuse. This is the survey's open problem — no family owns irregular memory access cleanly at scale. Sets up PIM later.</a:t>
             </a:r>
             <a:endParaRPr lang="en-US" dirty="0"/>
           </a:p>
@@ -1344,7 +1344,7 @@
           <a:p>
             <a:r>
               <a:rPr lang="en-US" dirty="0"/>
-              <a:t/>
+              <a:t>Credit software first. FlashAttention ~3×, vLLM 2-4× — huge and real. But each success reveals a residual bound (MoE still ~34%, always-on still &lt;300µW). The hardware case is that residue — never "software failed." This is the bridge into the framework.</a:t>
             </a:r>
             <a:endParaRPr lang="en-US" dirty="0"/>
           </a:p>
@@ -1432,7 +1432,7 @@
           <a:p>
             <a:r>
               <a:rPr lang="en-US" dirty="0"/>
-              <a:t/>
+              <a:t>Section 3 is the intellectual core. Two tools: six contracts (what can change) and the four-condition test (whether it should). Everything after is application.</a:t>
             </a:r>
             <a:endParaRPr lang="en-US" dirty="0"/>
           </a:p>
@@ -1520,7 +1520,7 @@
           <a:p>
             <a:r>
               <a:rPr lang="en-US" dirty="0"/>
-              <a:t/>
+              <a:t>Roadmap. The spine is movements 3 (framework) and 4 (families); everything before builds the pressures, everything after applies them. Reassure a software audience: hardware concepts are introduced as needed.</a:t>
             </a:r>
             <a:endParaRPr lang="en-US" dirty="0"/>
           </a:p>
@@ -1608,7 +1608,7 @@
           <a:p>
             <a:r>
               <a:rPr lang="en-US" dirty="0"/>
-              <a:t/>
+              <a:t>Six promises hardware makes to software: execution, data placement, numerical, scheduling, communication, software/tooling. A workload stresses only some. A new architecture is justified only where it changes a contract the workload actually stresses — else it's a faster answer to a non-problem.</a:t>
             </a:r>
             <a:endParaRPr lang="en-US" dirty="0"/>
           </a:p>
@@ -1696,7 +1696,7 @@
           <a:p>
             <a:r>
               <a:rPr lang="en-US" dirty="0"/>
-              <a:t/>
+              <a:t>The test that makes the talk decidable. All four must hold. 1-3 are engineering (is there a bound, does it hurt, does hardware truly move it). 4 is economics (volume, software enablement, flexibility). Most real proposals clear 1-3 and die on 4. Condition 3 subtlety: a "lever" must change the bound, not relocate the bottleneck.</a:t>
             </a:r>
             <a:endParaRPr lang="en-US" dirty="0"/>
           </a:p>
@@ -1784,7 +1784,7 @@
           <a:p>
             <a:r>
               <a:rPr lang="en-US" dirty="0"/>
-              <a:t/>
+              <a:t>Three real outcomes from the same reasoning. TPU v1: all four held (published 15-30× throughput, 30-80× perf/W under production latency SLOs) → specialize. Nervana/Graphcore: good silicon, condition 4 failed (no internal volume, CUDA switching cost) → market says no. Enterprise private serving: conditions 2 &amp; 4 fail → stay on GPU. Lesson: architecture selects the candidate; condition 4 decides.</a:t>
             </a:r>
             <a:endParaRPr lang="en-US" dirty="0"/>
           </a:p>
@@ -1872,7 +1872,7 @@
           <a:p>
             <a:r>
               <a:rPr lang="en-US" dirty="0"/>
-              <a:t/>
+              <a:t>Absorbed into the GPU platform: matrix density, narrow precision, movement overhead, scale-up comms — become GPU features. Structurally NOT absorbable: wake-scope energy, provable worst-case timing, near-sensor locality, embedded cost floors — absorbing them means abandoning what makes a GPU a GPU. Contested middle: low-batch decode, routing, near-memory — where the commercial fights are.</a:t>
             </a:r>
             <a:endParaRPr lang="en-US" dirty="0"/>
           </a:p>
@@ -1960,7 +1960,7 @@
           <a:p>
             <a:r>
               <a:rPr lang="en-US" dirty="0"/>
-              <a:t/>
+              <a:t>Section 4: the tour. Keep each family to "which contract did it change, and what does that buy?" Don't get lost in specs. Use the two-axis map (next slide) as the running frame.</a:t>
             </a:r>
             <a:endParaRPr lang="en-US" dirty="0"/>
           </a:p>
@@ -2048,7 +2048,7 @@
           <a:p>
             <a:r>
               <a:rPr lang="en-US" dirty="0"/>
-              <a:t/>
+              <a:t>Two axes. Horizontal: when execution uncertainty resolves — runtime (GPU) → compile time (tensor/dataflow) → design time (fixed) → input-driven (neuromorphic). Vertical: where state lives — DRAM → SRAM → in-memory. Every family is a displacement from CPU/GPU. No dominating point — each efficiency gain narrows an envelope. That's why plurality is permanent.</a:t>
             </a:r>
             <a:endParaRPr lang="en-US" dirty="0"/>
           </a:p>
@@ -2136,7 +2136,7 @@
           <a:p>
             <a:r>
               <a:rPr lang="en-US" dirty="0"/>
-              <a:t/>
+              <a:t>The mechanism under most matrix hardware. Weights sit in a grid; activations flow through; a value fetched once is reused by every cell it passes — memory traffic only at the edges. TPU v1's 256×256 array = 65,536 MACs. Weakness: a matrix-vector op uses one column, rest idle. Now absorbed by everyone (GPU tensor cores) — committing a whole die to one big array is a bet on shape stability.</a:t>
             </a:r>
             <a:endParaRPr lang="en-US" dirty="0"/>
           </a:p>
@@ -2224,7 +2224,7 @@
           <a:p>
             <a:r>
               <a:rPr lang="en-US" dirty="0"/>
-              <a:t/>
+              <a:t>Tensor processor = matrix engine + software-managed SRAM + DMA, all under ONE compiler-owned static schedule (vs the GPU's hardware scheduling). Contract changes: execution + scheduling + software. Wins stable dense portfolios at owner scale — hence every hyperscaler builds one. Risk: the compiler is load-bearing; coverage gaps become deployment blockers.</a:t>
             </a:r>
             <a:endParaRPr lang="en-US" dirty="0"/>
           </a:p>
@@ -2312,7 +2312,7 @@
           <a:p>
             <a:r>
               <a:rPr lang="en-US" dirty="0"/>
-              <a:t/>
+              <a:t>Push compile-time ownership to the limit: every operation and transfer placed at a fixed cycle → zero run-time variance, only device-boundary queueing. Buys deterministic low latency and reproducibility (Groq TSP, SambaNova, Tenstorrent). Cost: worst-case padding for dynamic shapes, and heavy compiler solve. Bids for latency-bounded decode.</a:t>
             </a:r>
             <a:endParaRPr lang="en-US" dirty="0"/>
           </a:p>
@@ -2400,7 +2400,7 @@
           <a:p>
             <a:r>
               <a:rPr lang="en-US" dirty="0"/>
-              <a:t/>
+              <a:t>OBSERVATION, not a claim of compute dominance. Hard facts (class A): every mainstream client SoC ships an NPU; Copilot+ mandates ≥40 TOPS (Intel ~48, AMD ~50, Qualcomm 45-85, Apple Neural Engine since 2017); positioned for sustained/ambient low-power work. COUNTER-FACT: heavy local generative inference still runs mostly on the client GPU (CUDA/DirectML) — "the great NPU failure" — because NPU software/operator coverage lags; utilization is low. TOPS ≠ usage. Defensible claim = the takeaway (structural bounds outside the GPU contract). If asked observation vs prediction: mostly observation + a conditional forward claim; softened from "own."</a:t>
             </a:r>
             <a:endParaRPr lang="en-US" dirty="0"/>
           </a:p>
@@ -2488,7 +2488,7 @@
           <a:p>
             <a:r>
               <a:rPr lang="en-US" dirty="0"/>
-              <a:t/>
+              <a:t>Vocabulary. Plant three ideas: bandwidth (HBM) is usually the scarce resource; a "contract" is a promise to software that specialization renegotiates; TOPS is marketing, not a benchmark. Systolic array preview: reuse from geometry — comes back as the mechanism under tensor processors.</a:t>
             </a:r>
             <a:endParaRPr lang="en-US" dirty="0"/>
           </a:p>
@@ -2576,7 +2576,7 @@
           <a:p>
             <a:r>
               <a:rPr lang="en-US" dirty="0"/>
-              <a:t/>
+              <a:t>FPGA changes the software contract: structure is configured after manufacturing. Two speeds — full hardware compile (hours, max efficiency, hardware skills) vs overlay/soft-NPU (seconds, software skills). Wins where post-manufacture flexibility IS the requirement (interfaces, long-lifecycle, format experimentation — Microsoft Catapult/Brainwave). Elsewhere it's the industry's staging tier: prove condition 1-3 on FPGA before committing to an ASIC.</a:t>
             </a:r>
             <a:endParaRPr lang="en-US" dirty="0"/>
           </a:p>
@@ -2664,7 +2664,7 @@
           <a:p>
             <a:r>
               <a:rPr lang="en-US" dirty="0"/>
-              <a:t/>
+              <a:t>Refuse the reticle limit: build one logical accelerator across a whole wafer, so inter-chip comms become on-wafer routing and model-scale state sits in distributed SRAM (Cerebras WSE: ~44 GB on-wafer SRAM, ~21 PB/s). Defects routed around. Contract changes: communication + data placement. Condition 4 met not by broad adoption but by a few enormous anchor tenants.</a:t>
             </a:r>
             <a:endParaRPr lang="en-US" dirty="0"/>
           </a:p>
@@ -2752,7 +2752,7 @@
           <a:p>
             <a:r>
               <a:rPr lang="en-US" dirty="0"/>
-              <a:t/>
+              <a:t>Move compute to the data. Three flavors: in-DRAM SIMD beside banks (Aquabolt-XL, UPMEM), all-SRAM inference with no off-chip tier (NorthPole), tiered capacity attached to the accelerator (SN40L). Attacks the most-measured bounds (decode streaming, embedding gather, mobile wake). Strongest condition-3 case in the whole survey. Gated by ONE thing: no portable programming model.</a:t>
             </a:r>
             <a:endParaRPr lang="en-US" dirty="0"/>
           </a:p>
@@ -2840,7 +2840,7 @@
           <a:p>
             <a:r>
               <a:rPr lang="en-US" dirty="0"/>
-              <a:t/>
+              <a:t>Forward-looking, evidence class C/E — be explicit it's not shipping at scale. Input schedules the machine: energy ∝ activity. Validates the energy model (TrueNorth, Loihi) but the dense-tensor/backprop stack maps poorly onto spikes. Plausible beachhead: extreme-edge sparse-in-time sensing. Frame as the theoretical endpoint of the wake-scope logic, not a near-term product.</a:t>
             </a:r>
             <a:endParaRPr lang="en-US" dirty="0"/>
           </a:p>
@@ -2928,7 +2928,7 @@
           <a:p>
             <a:r>
               <a:rPr lang="en-US" dirty="0"/>
-              <a:t/>
+              <a:t>Same families from µW silicon to MW pods, resized against different binding constraints. Ideas migrate both ways (unified memory up, quantization down); implementations diverge because each deployment prices stressors differently. One shared taxonomy, not two industries — this is the payoff of the whole method.</a:t>
             </a:r>
             <a:endParaRPr lang="en-US" dirty="0"/>
           </a:p>
@@ -3016,7 +3016,7 @@
           <a:p>
             <a:r>
               <a:rPr lang="en-US" dirty="0"/>
-              <a:t/>
+              <a:t>Section 5: apply the framework to the real market. Keep it GROUPED — resist the urge to spec-dump. The point is HOW each group resolves condition 4, not part numbers.</a:t>
             </a:r>
             <a:endParaRPr lang="en-US" dirty="0"/>
           </a:p>
@@ -3104,7 +3104,7 @@
           <a:p>
             <a:r>
               <a:rPr lang="en-US" dirty="0"/>
-              <a:t/>
+              <a:t>Three buckets read through condition 4: incumbents (absorb, sell rack-scale), hyperscaler silicon (condition 4 met at owner scale), challengers (license/anchor/acquire). Headline: none failed on architecture — software capital, volume, and distribution decided every outcome.</a:t>
             </a:r>
             <a:endParaRPr lang="en-US" dirty="0"/>
           </a:p>
@@ -3192,7 +3192,7 @@
           <a:p>
             <a:r>
               <a:rPr lang="en-US" dirty="0"/>
-              <a:t/>
+              <a:t>The §2.14 TPU verdict replicated at every major cloud — because each has the owner-scale volume + internal model portfolio that satisfies condition 4. Note the two live experiments: inference-first is the new default (serving economics dominate fleet cost), and fabric philosophy has forked (proprietary scale-up vs commodity Ethernet). Snapshot facts — will age; the structural reading won't.</a:t>
             </a:r>
             <a:endParaRPr lang="en-US" dirty="0"/>
           </a:p>
@@ -3280,7 +3280,7 @@
           <a:p>
             <a:r>
               <a:rPr lang="en-US" dirty="0"/>
-              <a:t/>
+              <a:t>Incumbents (NVIDIA, AMD) now sell rack-scale coherent domains, not cards. Every headline number is a MEMORY or scale-up number — capacity, bandwidth, NVLink-domain size — clustering tightly. That's the absorption thesis in public: they spend transistor/packaging budget on exactly the bounds Chapter 2 measured. The binding purchase constraint is increasingly power, not silicon.</a:t>
             </a:r>
             <a:endParaRPr lang="en-US" dirty="0"/>
           </a:p>
@@ -3368,7 +3368,7 @@
           <a:p>
             <a:r>
               <a:rPr lang="en-US" dirty="0"/>
-              <a:t/>
+              <a:t>How the contested middle resolved in 2025-26: Groq licensed its LPU into NVIDIA (condition 3 vindicated — incumbent paid billions — AND condition 4 enforced); Cerebras survived on anchor tenancy + IPO; Tenstorrent in acquisition talks; SambaNova a niche appliance. The absorption partition predicted GPU-platform absorption; the surprise was the MECHANISM (licensing-in a whole contract). All class-D reporting — flag as such.</a:t>
             </a:r>
             <a:endParaRPr lang="en-US" dirty="0"/>
           </a:p>
@@ -3456,7 +3456,7 @@
           <a:p>
             <a:r>
               <a:rPr lang="en-US" dirty="0"/>
-              <a:t/>
+              <a:t>Section 1 goal: establish that the pressures are PHYSICAL (energy, bandwidth, timing) — not software immaturity. Everything here is a "driving factor" the later families answer.</a:t>
             </a:r>
             <a:endParaRPr lang="en-US" dirty="0"/>
           </a:p>
@@ -3544,7 +3544,7 @@
           <a:p>
             <a:r>
               <a:rPr lang="en-US" dirty="0"/>
-              <a:t/>
+              <a:t>Client/edge grouped. Recurring theme: memory and coverage, not TOPS, decide. Robotics is the instructive case — it deliberately pays the GPU's generality tax because algorithms churn fastest (flexibility wins). Automotive turns determinism/lifecycle into certification objects. Same families as the datacenter, different binding constraints.</a:t>
             </a:r>
             <a:endParaRPr lang="en-US" dirty="0"/>
           </a:p>
@@ -3632,7 +3632,7 @@
           <a:p>
             <a:r>
               <a:rPr lang="en-US" dirty="0"/>
-              <a:t/>
+              <a:t>Section 6: the substrate that actually decides winners — software capital, packaging/memory, and the cost stack. This is where condition 4 lives.</a:t>
             </a:r>
             <a:endParaRPr lang="en-US" dirty="0"/>
           </a:p>
@@ -3720,7 +3720,7 @@
           <a:p>
             <a:r>
               <a:rPr lang="en-US" dirty="0"/>
-              <a:t/>
+              <a:t>CUDA's moat has moved UP the stack: kernel syntax is now mirrored (ROCm/HIP) or abstracted (Triton), so the defensible layers are distributed libraries, serving policy, numerical recipes, operational tooling. The "narrow waist" question: PyTorch as authoring waist, Triton-class DSL as operator waist, proprietary residue in collectives/serving. For a challenger: name which waist you enter and what you do about the residue. "Build our own waist" fails at merchant scale.</a:t>
             </a:r>
             <a:endParaRPr lang="en-US" dirty="0"/>
           </a:p>
@@ -3808,7 +3808,7 @@
           <a:p>
             <a:r>
               <a:rPr lang="en-US" dirty="0"/>
-              <a:t/>
+              <a:t>The frontier moved from logic to integration. HBM sets every bandwidth bound and its supply/cost is a condition-4 term (three vendors; can rival the logic die in BOM). Packaging: the ~800mm² reticle limit drives 2.5D/chiplets/hybrid bonding; advanced-packaging capacity gates supply. Fabric: scale-up vs Ethernet; co-packaged optics attacks network POWER. Most of Chapter 11's futures are packaging stories.</a:t>
             </a:r>
             <a:endParaRPr lang="en-US" dirty="0"/>
           </a:p>
@@ -3896,7 +3896,7 @@
           <a:p>
             <a:r>
               <a:rPr lang="en-US" dirty="0"/>
-              <a:t/>
+              <a:t>The full stack from die to service: memory, packaging, board, fabric, rack+cooling, facility power, software enablement, ops, risk. Every family REDISTRIBUTES weight (wafer-scale moves fabric cost into yield; PIM moves logic into memory; NPU into per-unit area) — none shrinks it uniformly. Condition 4 in cost terms: does the redistribution lower the TOTAL for this workload at this volume? Power increasingly gates deployment ahead of capital.</a:t>
             </a:r>
             <a:endParaRPr lang="en-US" dirty="0"/>
           </a:p>
@@ -3984,7 +3984,7 @@
           <a:p>
             <a:r>
               <a:rPr lang="en-US" dirty="0"/>
-              <a:t/>
+              <a:t>Worked break-even (illustrative). Fixed cost dominated by software enablement; recurring savings scale with volume, fixed cost doesn't → a volume threshold. Below it, no efficiency % rescues the case; above it, small % justify huge programs. Explains hyperscale-yes vs enterprise-no on identical architecture (different denominator). Price flexibility as option value: a 20% win today bets the workload holds still.</a:t>
             </a:r>
             <a:endParaRPr lang="en-US" dirty="0"/>
           </a:p>
@@ -4072,7 +4072,7 @@
           <a:p>
             <a:r>
               <a:rPr lang="en-US" dirty="0"/>
-              <a:t/>
+              <a:t>Section 7: futures with evidence discipline, then the durable conclusions. Keep futures humble — grade every claim.</a:t>
             </a:r>
             <a:endParaRPr lang="en-US" dirty="0"/>
           </a:p>
@@ -4160,7 +4160,7 @@
           <a:p>
             <a:r>
               <a:rPr lang="en-US" dirty="0"/>
-              <a:t/>
+              <a:t>Grade every future. Scheduled (A/B): HBM4, CPO, FP4, chiplets — intensify the present. PIM (B/C) standardizing. Photonic interconnect (A/B) yes, photonic COMPUTATION (C/E) defeated at the conversion boundary today. Analog in-memory (C). Two rules: new memories arrive before new logic; the nearest contract changes enter INSIDE incumbent platforms via packaging, not as standalone families.</a:t>
             </a:r>
             <a:endParaRPr lang="en-US" dirty="0"/>
           </a:p>
@@ -4248,7 +4248,7 @@
           <a:p>
             <a:r>
               <a:rPr lang="en-US" dirty="0"/>
-              <a:t/>
+              <a:t>The demand side may move before the supply side. Test-time compute (reason longer) deepens the decode bound → strengthens every inference-first thesis. Persistent-state agents promote state residency/freshness — territory no family owns cleanly, the likeliest source of a genuinely new family. Default sparsity pushes routing/gather up. The method predicts its own revision: re-derive the taxonomy from measured signatures each edition.</a:t>
             </a:r>
             <a:endParaRPr lang="en-US" dirty="0"/>
           </a:p>
@@ -4336,7 +4336,7 @@
           <a:p>
             <a:r>
               <a:rPr lang="en-US" dirty="0"/>
-              <a:t/>
+              <a:t>Six findings, each traceable to evidence shown. Leave two ringing: (C) condition 4 / software capital decides most outcomes — audit the stack before the silicon; (E) bounds moved to memory, fabric, facility power — arithmetic peak no longer separates contenders. The one durable tool: the four-condition test.</a:t>
             </a:r>
             <a:endParaRPr lang="en-US" dirty="0"/>
           </a:p>
@@ -4424,7 +4424,7 @@
           <a:p>
             <a:r>
               <a:rPr lang="en-US" dirty="0"/>
-              <a:t/>
+              <a:t>Thesis. Both transitions = software succeeding until it exposed a physical/economic limit. Each ADDS an execution domain; nothing is retired. Same pattern, three lanes (datacenter/mobile/embedded) under different dominant constraints — we follow all three.</a:t>
             </a:r>
             <a:endParaRPr lang="en-US" dirty="0"/>
           </a:p>
@@ -4512,7 +4512,7 @@
           <a:p>
             <a:r>
               <a:rPr lang="en-US" dirty="0"/>
-              <a:t/>
+              <a:t>Role-specific takeaways. Software architects: design against signatures, respect the batch-one ceiling, measure at the useful-result boundary. Platform architects: evaluate at pod/facility, prefer rented specialization to ownership below hyperscale volume, protect the software seams that preserve exit options. Selection: a sequence — signatures → honest software ceiling → locate the bound in the absorption partition → weight the software stack → run the test.</a:t>
             </a:r>
             <a:endParaRPr lang="en-US" dirty="0"/>
           </a:p>
@@ -4600,7 +4600,7 @@
           <a:p>
             <a:r>
               <a:rPr lang="en-US" dirty="0"/>
-              <a:t/>
+              <a:t>Close on the one sentence and stop. The machinery (signatures, contracts, families, economics) exists to make that choice decidable rather than rhetorical. Hand them the four-condition test as the portable takeaway.</a:t>
             </a:r>
             <a:endParaRPr lang="en-US" dirty="0"/>
           </a:p>
@@ -4688,7 +4688,7 @@
           <a:p>
             <a:r>
               <a:rPr lang="en-US" dirty="0"/>
-              <a:t/>
+              <a:t>Four decades of constraint in one slide. Memory wall (Wulf &amp; McKee 1995): compute outran DRAM, so locality/reuse became the question. Power wall + Dennard scaling ending → multicore, but only if software exposes parallelism. Dark silicon → can't power all transistors at once, so specialize. Data movement is the thread that ties them together and sets up the next slide.</a:t>
             </a:r>
             <a:endParaRPr lang="en-US" dirty="0"/>
           </a:p>
@@ -4776,7 +4776,7 @@
           <a:p>
             <a:r>
               <a:rPr lang="en-US" dirty="0"/>
-              <a:t/>
+              <a:t>Horowitz 45nm: FP add ~0.9 pJ vs DRAM word read ~640 pJ — ~700×. So energy and bottleneck are set by data movement. This one fact justifies nearly every family later. Ratio holds even as absolute numbers shift with node.</a:t>
             </a:r>
             <a:endParaRPr lang="en-US" dirty="0"/>
           </a:p>
@@ -4864,7 +4864,7 @@
           <a:p>
             <a:r>
               <a:rPr lang="en-US" dirty="0"/>
-              <a:t/>
+              <a:t>Memory = ladder trading capacity for latency/energy. "Memory-bound" hides bandwidth, capacity, overfetch, irregular access, insufficient reuse. Caches pay only with reuse before eviction. Each rung is a different lever — remember at the families.</a:t>
             </a:r>
             <a:endParaRPr lang="en-US" dirty="0"/>
           </a:p>
@@ -4952,7 +4952,7 @@
           <a:p>
             <a:r>
               <a:rPr lang="en-US" dirty="0"/>
-              <a:t/>
+              <a:t>Where transistors go. CPU: latency on branchy diverse code (caches, prediction, OoO). GPU: throughput lanes. Specialization is the next step on the same axis — narrower job, more useful work per mm² and per joule, for work that fits.</a:t>
             </a:r>
             <a:endParaRPr lang="en-US" dirty="0"/>
           </a:p>
@@ -6740,7 +6740,7 @@
               <a:buNone/>
             </a:pPr>
             <a:r>
-              <a:rPr lang="en-US" sz="1350" dirty="0">
+              <a:rPr lang="en-US" sz="1300" dirty="0">
                 <a:solidFill>
                   <a:srgbClr val="263947"/>
                 </a:solidFill>
@@ -6750,7 +6750,7 @@
               </a:rPr>
               <a:t>70B model, 8-bit, one sequence.</a:t>
             </a:r>
-            <a:endParaRPr lang="en-US" sz="1350" dirty="0"/>
+            <a:endParaRPr lang="en-US" sz="1300" dirty="0"/>
           </a:p>
         </p:txBody>
       </p:sp>
@@ -6762,7 +6762,7 @@
         </p:nvSpPr>
         <p:spPr>
           <a:xfrm>
-            <a:off x="8138160" y="2633472"/>
+            <a:off x="8138160" y="2596896"/>
             <a:ext cx="109728" cy="109728"/>
           </a:xfrm>
           <a:prstGeom prst="rect">
@@ -6782,7 +6782,7 @@
         </p:nvSpPr>
         <p:spPr>
           <a:xfrm>
-            <a:off x="8366760" y="2459736"/>
+            <a:off x="8366760" y="2423160"/>
             <a:ext cx="3291840" cy="731520"/>
           </a:xfrm>
           <a:prstGeom prst="rect">
@@ -6799,7 +6799,7 @@
               <a:buNone/>
             </a:pPr>
             <a:r>
-              <a:rPr lang="en-US" sz="1350" dirty="0">
+              <a:rPr lang="en-US" sz="1300" dirty="0">
                 <a:solidFill>
                   <a:srgbClr val="263947"/>
                 </a:solidFill>
@@ -6809,7 +6809,7 @@
               </a:rPr>
               <a:t>≈48 tokens/s ceiling on an H100.</a:t>
             </a:r>
-            <a:endParaRPr lang="en-US" sz="1350" dirty="0"/>
+            <a:endParaRPr lang="en-US" sz="1300" dirty="0"/>
           </a:p>
         </p:txBody>
       </p:sp>
@@ -6821,7 +6821,7 @@
         </p:nvSpPr>
         <p:spPr>
           <a:xfrm>
-            <a:off x="8138160" y="3419856"/>
+            <a:off x="8138160" y="3346704"/>
             <a:ext cx="109728" cy="109728"/>
           </a:xfrm>
           <a:prstGeom prst="rect">
@@ -6841,7 +6841,7 @@
         </p:nvSpPr>
         <p:spPr>
           <a:xfrm>
-            <a:off x="8366760" y="3246120"/>
+            <a:off x="8366760" y="3172968"/>
             <a:ext cx="3291840" cy="731520"/>
           </a:xfrm>
           <a:prstGeom prst="rect">
@@ -6858,7 +6858,7 @@
               <a:buNone/>
             </a:pPr>
             <a:r>
-              <a:rPr lang="en-US" sz="1350" dirty="0">
+              <a:rPr lang="en-US" sz="1300" dirty="0">
                 <a:solidFill>
                   <a:srgbClr val="263947"/>
                 </a:solidFill>
@@ -6868,7 +6868,7 @@
               </a:rPr>
               <a:t>~0.3% of matrix throughput used.</a:t>
             </a:r>
-            <a:endParaRPr lang="en-US" sz="1350" dirty="0"/>
+            <a:endParaRPr lang="en-US" sz="1300" dirty="0"/>
           </a:p>
         </p:txBody>
       </p:sp>
@@ -7208,7 +7208,7 @@
               <a:buNone/>
             </a:pPr>
             <a:r>
-              <a:rPr lang="en-US" sz="1350" dirty="0">
+              <a:rPr lang="en-US" sz="1300" dirty="0">
                 <a:solidFill>
                   <a:srgbClr val="263947"/>
                 </a:solidFill>
@@ -7218,7 +7218,7 @@
               </a:rPr>
               <a:t>Always-on: microwatts.</a:t>
             </a:r>
-            <a:endParaRPr lang="en-US" sz="1350" dirty="0"/>
+            <a:endParaRPr lang="en-US" sz="1300" dirty="0"/>
           </a:p>
         </p:txBody>
       </p:sp>
@@ -7230,7 +7230,7 @@
         </p:nvSpPr>
         <p:spPr>
           <a:xfrm>
-            <a:off x="8138160" y="2633472"/>
+            <a:off x="8138160" y="2596896"/>
             <a:ext cx="109728" cy="109728"/>
           </a:xfrm>
           <a:prstGeom prst="rect">
@@ -7250,7 +7250,7 @@
         </p:nvSpPr>
         <p:spPr>
           <a:xfrm>
-            <a:off x="8366760" y="2459736"/>
+            <a:off x="8366760" y="2423160"/>
             <a:ext cx="3291840" cy="731520"/>
           </a:xfrm>
           <a:prstGeom prst="rect">
@@ -7267,7 +7267,7 @@
               <a:buNone/>
             </a:pPr>
             <a:r>
-              <a:rPr lang="en-US" sz="1350" dirty="0">
+              <a:rPr lang="en-US" sz="1300" dirty="0">
                 <a:solidFill>
                   <a:srgbClr val="263947"/>
                 </a:solidFill>
@@ -7277,7 +7277,7 @@
               </a:rPr>
               <a:t>Cloud round-trip: watts.</a:t>
             </a:r>
-            <a:endParaRPr lang="en-US" sz="1350" dirty="0"/>
+            <a:endParaRPr lang="en-US" sz="1300" dirty="0"/>
           </a:p>
         </p:txBody>
       </p:sp>
@@ -7289,7 +7289,7 @@
         </p:nvSpPr>
         <p:spPr>
           <a:xfrm>
-            <a:off x="8138160" y="3419856"/>
+            <a:off x="8138160" y="3346704"/>
             <a:ext cx="109728" cy="109728"/>
           </a:xfrm>
           <a:prstGeom prst="rect">
@@ -7309,7 +7309,7 @@
         </p:nvSpPr>
         <p:spPr>
           <a:xfrm>
-            <a:off x="8366760" y="3246120"/>
+            <a:off x="8366760" y="3172968"/>
             <a:ext cx="3291840" cy="731520"/>
           </a:xfrm>
           <a:prstGeom prst="rect">
@@ -7326,7 +7326,7 @@
               <a:buNone/>
             </a:pPr>
             <a:r>
-              <a:rPr lang="en-US" sz="1350" dirty="0">
+              <a:rPr lang="en-US" sz="1300" dirty="0">
                 <a:solidFill>
                   <a:srgbClr val="263947"/>
                 </a:solidFill>
@@ -7336,7 +7336,7 @@
               </a:rPr>
               <a:t>Wake scope sets the cost.</a:t>
             </a:r>
-            <a:endParaRPr lang="en-US" sz="1350" dirty="0"/>
+            <a:endParaRPr lang="en-US" sz="1300" dirty="0"/>
           </a:p>
         </p:txBody>
       </p:sp>
@@ -13779,7 +13779,7 @@
                 <a:ea typeface="Cambria" pitchFamily="34" charset="-122"/>
                 <a:cs typeface="Cambria" pitchFamily="34" charset="-120"/>
               </a:rPr>
-              <a:t>NPUs and near-sensor engines</a:t>
+              <a:t>NPUs are the client's standard low-power AI block</a:t>
             </a:r>
             <a:endParaRPr lang="en-US" sz="3000" dirty="0"/>
           </a:p>
@@ -13853,7 +13853,7 @@
               <a:buNone/>
             </a:pPr>
             <a:r>
-              <a:rPr lang="en-US" sz="1350" dirty="0">
+              <a:rPr lang="en-US" sz="1300" dirty="0">
                 <a:solidFill>
                   <a:srgbClr val="263947"/>
                 </a:solidFill>
@@ -13861,9 +13861,9 @@
                 <a:ea typeface="Calibri" pitchFamily="34" charset="-122"/>
                 <a:cs typeface="Calibri" pitchFamily="34" charset="-120"/>
               </a:rPr>
-              <a:t>Power-domain-first design.</a:t>
-            </a:r>
-            <a:endParaRPr lang="en-US" sz="1350" dirty="0"/>
+              <a:t>Universal in client SoCs (≥40 TOPS floor).</a:t>
+            </a:r>
+            <a:endParaRPr lang="en-US" sz="1300" dirty="0"/>
           </a:p>
         </p:txBody>
       </p:sp>
@@ -13875,7 +13875,7 @@
         </p:nvSpPr>
         <p:spPr>
           <a:xfrm>
-            <a:off x="8138160" y="2633472"/>
+            <a:off x="8138160" y="2596896"/>
             <a:ext cx="109728" cy="109728"/>
           </a:xfrm>
           <a:prstGeom prst="rect">
@@ -13895,7 +13895,7 @@
         </p:nvSpPr>
         <p:spPr>
           <a:xfrm>
-            <a:off x="8366760" y="2459736"/>
+            <a:off x="8366760" y="2423160"/>
             <a:ext cx="3291840" cy="731520"/>
           </a:xfrm>
           <a:prstGeom prst="rect">
@@ -13912,7 +13912,7 @@
               <a:buNone/>
             </a:pPr>
             <a:r>
-              <a:rPr lang="en-US" sz="1350" dirty="0">
+              <a:rPr lang="en-US" sz="1300" dirty="0">
                 <a:solidFill>
                   <a:srgbClr val="263947"/>
                 </a:solidFill>
@@ -13920,9 +13920,9 @@
                 <a:ea typeface="Calibri" pitchFamily="34" charset="-122"/>
                 <a:cs typeface="Calibri" pitchFamily="34" charset="-120"/>
               </a:rPr>
-              <a:t>Value = wake-scope energy.</a:t>
-            </a:r>
-            <a:endParaRPr lang="en-US" sz="1350" dirty="0"/>
+              <a:t>Power-domain-first; sustained/ambient work.</a:t>
+            </a:r>
+            <a:endParaRPr lang="en-US" sz="1300" dirty="0"/>
           </a:p>
         </p:txBody>
       </p:sp>
@@ -13934,7 +13934,7 @@
         </p:nvSpPr>
         <p:spPr>
           <a:xfrm>
-            <a:off x="8138160" y="3419856"/>
+            <a:off x="8138160" y="3346704"/>
             <a:ext cx="109728" cy="109728"/>
           </a:xfrm>
           <a:prstGeom prst="rect">
@@ -13954,7 +13954,7 @@
         </p:nvSpPr>
         <p:spPr>
           <a:xfrm>
-            <a:off x="8366760" y="3246120"/>
+            <a:off x="8366760" y="3172968"/>
             <a:ext cx="3291840" cy="731520"/>
           </a:xfrm>
           <a:prstGeom prst="rect">
@@ -13971,7 +13971,7 @@
               <a:buNone/>
             </a:pPr>
             <a:r>
-              <a:rPr lang="en-US" sz="1350" dirty="0">
+              <a:rPr lang="en-US" sz="1300" dirty="0">
                 <a:solidFill>
                   <a:srgbClr val="263947"/>
                 </a:solidFill>
@@ -13979,15 +13979,74 @@
                 <a:ea typeface="Calibri" pitchFamily="34" charset="-122"/>
                 <a:cs typeface="Calibri" pitchFamily="34" charset="-120"/>
               </a:rPr>
-              <a:t>Coverage, not TOPS, decides.</a:t>
-            </a:r>
-            <a:endParaRPr lang="en-US" sz="1350" dirty="0"/>
+              <a:t>Heavy generative inference still runs on the GPU.</a:t>
+            </a:r>
+            <a:endParaRPr lang="en-US" sz="1300" dirty="0"/>
           </a:p>
         </p:txBody>
       </p:sp>
       <p:sp>
         <p:nvSpPr>
           <p:cNvPr id="11" name="Shape 8"/>
+          <p:cNvSpPr/>
+          <p:nvPr/>
+        </p:nvSpPr>
+        <p:spPr>
+          <a:xfrm>
+            <a:off x="8138160" y="4096512"/>
+            <a:ext cx="109728" cy="109728"/>
+          </a:xfrm>
+          <a:prstGeom prst="rect">
+            <a:avLst/>
+          </a:prstGeom>
+          <a:solidFill>
+            <a:srgbClr val="E08A2B"/>
+          </a:solidFill>
+          <a:ln/>
+        </p:spPr>
+      </p:sp>
+      <p:sp>
+        <p:nvSpPr>
+          <p:cNvPr id="12" name="Text 9"/>
+          <p:cNvSpPr/>
+          <p:nvPr/>
+        </p:nvSpPr>
+        <p:spPr>
+          <a:xfrm>
+            <a:off x="8366760" y="3922776"/>
+            <a:ext cx="3291840" cy="731520"/>
+          </a:xfrm>
+          <a:prstGeom prst="rect">
+            <a:avLst/>
+          </a:prstGeom>
+          <a:noFill/>
+          <a:ln/>
+        </p:spPr>
+        <p:txBody>
+          <a:bodyPr wrap="square" rtlCol="0" anchor="t"/>
+          <a:lstStyle/>
+          <a:p>
+            <a:pPr indent="0" marL="0">
+              <a:buNone/>
+            </a:pPr>
+            <a:r>
+              <a:rPr lang="en-US" sz="1300" dirty="0">
+                <a:solidFill>
+                  <a:srgbClr val="263947"/>
+                </a:solidFill>
+                <a:latin typeface="Calibri" pitchFamily="34" charset="0"/>
+                <a:ea typeface="Calibri" pitchFamily="34" charset="-122"/>
+                <a:cs typeface="Calibri" pitchFamily="34" charset="-120"/>
+              </a:rPr>
+              <a:t>Coverage, not TOPS, decides value.</a:t>
+            </a:r>
+            <a:endParaRPr lang="en-US" sz="1300" dirty="0"/>
+          </a:p>
+        </p:txBody>
+      </p:sp>
+      <p:sp>
+        <p:nvSpPr>
+          <p:cNvPr id="13" name="Shape 10"/>
           <p:cNvSpPr/>
           <p:nvPr/>
         </p:nvSpPr>
@@ -14014,7 +14073,7 @@
       </p:sp>
       <p:sp>
         <p:nvSpPr>
-          <p:cNvPr id="12" name="Text 9"/>
+          <p:cNvPr id="14" name="Text 11"/>
           <p:cNvSpPr/>
           <p:nvPr/>
         </p:nvSpPr>
@@ -14059,7 +14118,7 @@
                 <a:ea typeface="Calibri" pitchFamily="34" charset="-122"/>
                 <a:cs typeface="Calibri" pitchFamily="34" charset="-120"/>
               </a:rPr>
-              <a:t>The most secure beyond-GPU territory: wake scope and cost floors are structurally outside the GPU contract.</a:t>
+              <a:t>Structural claim: wake-scope energy + cost floors sit outside the GPU contract, so the edge is where specialization is safest — not that NPUs win the client outright.</a:t>
             </a:r>
             <a:endParaRPr lang="en-US" sz="1400" dirty="0"/>
           </a:p>
@@ -14067,7 +14126,7 @@
       </p:sp>
       <p:sp>
         <p:nvSpPr>
-          <p:cNvPr id="13" name="Text 10"/>
+          <p:cNvPr id="15" name="Text 12"/>
           <p:cNvSpPr/>
           <p:nvPr/>
         </p:nvSpPr>
@@ -14106,7 +14165,7 @@
       </p:sp>
       <p:sp>
         <p:nvSpPr>
-          <p:cNvPr id="14" name="Text 11"/>
+          <p:cNvPr id="16" name="Text 13"/>
           <p:cNvSpPr/>
           <p:nvPr/>
         </p:nvSpPr>
@@ -21554,7 +21613,7 @@
               <a:buNone/>
             </a:pPr>
             <a:r>
-              <a:rPr lang="en-US" sz="1350" dirty="0">
+              <a:rPr lang="en-US" sz="1300" dirty="0">
                 <a:solidFill>
                   <a:srgbClr val="263947"/>
                 </a:solidFill>
@@ -21564,7 +21623,7 @@
               </a:rPr>
               <a:t>Every family redistributes weight.</a:t>
             </a:r>
-            <a:endParaRPr lang="en-US" sz="1350" dirty="0"/>
+            <a:endParaRPr lang="en-US" sz="1300" dirty="0"/>
           </a:p>
         </p:txBody>
       </p:sp>
@@ -21576,7 +21635,7 @@
         </p:nvSpPr>
         <p:spPr>
           <a:xfrm>
-            <a:off x="8138160" y="2633472"/>
+            <a:off x="8138160" y="2596896"/>
             <a:ext cx="109728" cy="109728"/>
           </a:xfrm>
           <a:prstGeom prst="rect">
@@ -21596,7 +21655,7 @@
         </p:nvSpPr>
         <p:spPr>
           <a:xfrm>
-            <a:off x="8366760" y="2459736"/>
+            <a:off x="8366760" y="2423160"/>
             <a:ext cx="3291840" cy="731520"/>
           </a:xfrm>
           <a:prstGeom prst="rect">
@@ -21613,7 +21672,7 @@
               <a:buNone/>
             </a:pPr>
             <a:r>
-              <a:rPr lang="en-US" sz="1350" dirty="0">
+              <a:rPr lang="en-US" sz="1300" dirty="0">
                 <a:solidFill>
                   <a:srgbClr val="263947"/>
                 </a:solidFill>
@@ -21623,7 +21682,7 @@
               </a:rPr>
               <a:t>None shrinks the stack uniformly.</a:t>
             </a:r>
-            <a:endParaRPr lang="en-US" sz="1350" dirty="0"/>
+            <a:endParaRPr lang="en-US" sz="1300" dirty="0"/>
           </a:p>
         </p:txBody>
       </p:sp>
@@ -21635,7 +21694,7 @@
         </p:nvSpPr>
         <p:spPr>
           <a:xfrm>
-            <a:off x="8138160" y="3419856"/>
+            <a:off x="8138160" y="3346704"/>
             <a:ext cx="109728" cy="109728"/>
           </a:xfrm>
           <a:prstGeom prst="rect">
@@ -21655,7 +21714,7 @@
         </p:nvSpPr>
         <p:spPr>
           <a:xfrm>
-            <a:off x="8366760" y="3246120"/>
+            <a:off x="8366760" y="3172968"/>
             <a:ext cx="3291840" cy="731520"/>
           </a:xfrm>
           <a:prstGeom prst="rect">
@@ -21672,7 +21731,7 @@
               <a:buNone/>
             </a:pPr>
             <a:r>
-              <a:rPr lang="en-US" sz="1350" dirty="0">
+              <a:rPr lang="en-US" sz="1300" dirty="0">
                 <a:solidFill>
                   <a:srgbClr val="263947"/>
                 </a:solidFill>
@@ -21682,7 +21741,7 @@
               </a:rPr>
               <a:t>Power now gates deployments.</a:t>
             </a:r>
-            <a:endParaRPr lang="en-US" sz="1350" dirty="0"/>
+            <a:endParaRPr lang="en-US" sz="1300" dirty="0"/>
           </a:p>
         </p:txBody>
       </p:sp>
@@ -22022,7 +22081,7 @@
               <a:buNone/>
             </a:pPr>
             <a:r>
-              <a:rPr lang="en-US" sz="1350" dirty="0">
+              <a:rPr lang="en-US" sz="1300" dirty="0">
                 <a:solidFill>
                   <a:srgbClr val="263947"/>
                 </a:solidFill>
@@ -22032,7 +22091,7 @@
               </a:rPr>
               <a:t>Fixed cost ≈ software enablement.</a:t>
             </a:r>
-            <a:endParaRPr lang="en-US" sz="1350" dirty="0"/>
+            <a:endParaRPr lang="en-US" sz="1300" dirty="0"/>
           </a:p>
         </p:txBody>
       </p:sp>
@@ -22044,7 +22103,7 @@
         </p:nvSpPr>
         <p:spPr>
           <a:xfrm>
-            <a:off x="8138160" y="2633472"/>
+            <a:off x="8138160" y="2596896"/>
             <a:ext cx="109728" cy="109728"/>
           </a:xfrm>
           <a:prstGeom prst="rect">
@@ -22064,7 +22123,7 @@
         </p:nvSpPr>
         <p:spPr>
           <a:xfrm>
-            <a:off x="8366760" y="2459736"/>
+            <a:off x="8366760" y="2423160"/>
             <a:ext cx="3291840" cy="731520"/>
           </a:xfrm>
           <a:prstGeom prst="rect">
@@ -22081,7 +22140,7 @@
               <a:buNone/>
             </a:pPr>
             <a:r>
-              <a:rPr lang="en-US" sz="1350" dirty="0">
+              <a:rPr lang="en-US" sz="1300" dirty="0">
                 <a:solidFill>
                   <a:srgbClr val="263947"/>
                 </a:solidFill>
@@ -22091,7 +22150,7 @@
               </a:rPr>
               <a:t>Savings scale with volume.</a:t>
             </a:r>
-            <a:endParaRPr lang="en-US" sz="1350" dirty="0"/>
+            <a:endParaRPr lang="en-US" sz="1300" dirty="0"/>
           </a:p>
         </p:txBody>
       </p:sp>
@@ -22103,7 +22162,7 @@
         </p:nvSpPr>
         <p:spPr>
           <a:xfrm>
-            <a:off x="8138160" y="3419856"/>
+            <a:off x="8138160" y="3346704"/>
             <a:ext cx="109728" cy="109728"/>
           </a:xfrm>
           <a:prstGeom prst="rect">
@@ -22123,7 +22182,7 @@
         </p:nvSpPr>
         <p:spPr>
           <a:xfrm>
-            <a:off x="8366760" y="3246120"/>
+            <a:off x="8366760" y="3172968"/>
             <a:ext cx="3291840" cy="731520"/>
           </a:xfrm>
           <a:prstGeom prst="rect">
@@ -22140,7 +22199,7 @@
               <a:buNone/>
             </a:pPr>
             <a:r>
-              <a:rPr lang="en-US" sz="1350" dirty="0">
+              <a:rPr lang="en-US" sz="1300" dirty="0">
                 <a:solidFill>
                   <a:srgbClr val="263947"/>
                 </a:solidFill>
@@ -22150,7 +22209,7 @@
               </a:rPr>
               <a:t>Flexibility has option value.</a:t>
             </a:r>
-            <a:endParaRPr lang="en-US" sz="1350" dirty="0"/>
+            <a:endParaRPr lang="en-US" sz="1300" dirty="0"/>
           </a:p>
         </p:txBody>
       </p:sp>
@@ -26600,7 +26659,7 @@
               <a:buNone/>
             </a:pPr>
             <a:r>
-              <a:rPr lang="en-US" sz="1350" dirty="0">
+              <a:rPr lang="en-US" sz="1300" dirty="0">
                 <a:solidFill>
                   <a:srgbClr val="263947"/>
                 </a:solidFill>
@@ -26610,7 +26669,7 @@
               </a:rPr>
               <a:t>Compute is nearly free.</a:t>
             </a:r>
-            <a:endParaRPr lang="en-US" sz="1350" dirty="0"/>
+            <a:endParaRPr lang="en-US" sz="1300" dirty="0"/>
           </a:p>
         </p:txBody>
       </p:sp>
@@ -26622,7 +26681,7 @@
         </p:nvSpPr>
         <p:spPr>
           <a:xfrm>
-            <a:off x="8138160" y="2633472"/>
+            <a:off x="8138160" y="2596896"/>
             <a:ext cx="109728" cy="109728"/>
           </a:xfrm>
           <a:prstGeom prst="rect">
@@ -26642,7 +26701,7 @@
         </p:nvSpPr>
         <p:spPr>
           <a:xfrm>
-            <a:off x="8366760" y="2459736"/>
+            <a:off x="8366760" y="2423160"/>
             <a:ext cx="3291840" cy="731520"/>
           </a:xfrm>
           <a:prstGeom prst="rect">
@@ -26659,7 +26718,7 @@
               <a:buNone/>
             </a:pPr>
             <a:r>
-              <a:rPr lang="en-US" sz="1350" dirty="0">
+              <a:rPr lang="en-US" sz="1300" dirty="0">
                 <a:solidFill>
                   <a:srgbClr val="263947"/>
                 </a:solidFill>
@@ -26669,7 +26728,7 @@
               </a:rPr>
               <a:t>Moving operands is not.</a:t>
             </a:r>
-            <a:endParaRPr lang="en-US" sz="1350" dirty="0"/>
+            <a:endParaRPr lang="en-US" sz="1300" dirty="0"/>
           </a:p>
         </p:txBody>
       </p:sp>
@@ -26681,7 +26740,7 @@
         </p:nvSpPr>
         <p:spPr>
           <a:xfrm>
-            <a:off x="8138160" y="3419856"/>
+            <a:off x="8138160" y="3346704"/>
             <a:ext cx="109728" cy="109728"/>
           </a:xfrm>
           <a:prstGeom prst="rect">
@@ -26701,7 +26760,7 @@
         </p:nvSpPr>
         <p:spPr>
           <a:xfrm>
-            <a:off x="8366760" y="3246120"/>
+            <a:off x="8366760" y="3172968"/>
             <a:ext cx="3291840" cy="731520"/>
           </a:xfrm>
           <a:prstGeom prst="rect">
@@ -26718,7 +26777,7 @@
               <a:buNone/>
             </a:pPr>
             <a:r>
-              <a:rPr lang="en-US" sz="1350" dirty="0">
+              <a:rPr lang="en-US" sz="1300" dirty="0">
                 <a:solidFill>
                   <a:srgbClr val="263947"/>
                 </a:solidFill>
@@ -26728,7 +26787,7 @@
               </a:rPr>
               <a:t>Locality sets efficiency, not FLOPS.</a:t>
             </a:r>
-            <a:endParaRPr lang="en-US" sz="1350" dirty="0"/>
+            <a:endParaRPr lang="en-US" sz="1300" dirty="0"/>
           </a:p>
         </p:txBody>
       </p:sp>
@@ -27068,7 +27127,7 @@
               <a:buNone/>
             </a:pPr>
             <a:r>
-              <a:rPr lang="en-US" sz="1350" dirty="0">
+              <a:rPr lang="en-US" sz="1300" dirty="0">
                 <a:solidFill>
                   <a:srgbClr val="263947"/>
                 </a:solidFill>
@@ -27078,7 +27137,7 @@
               </a:rPr>
               <a:t>Farther = more capacity.</a:t>
             </a:r>
-            <a:endParaRPr lang="en-US" sz="1350" dirty="0"/>
+            <a:endParaRPr lang="en-US" sz="1300" dirty="0"/>
           </a:p>
         </p:txBody>
       </p:sp>
@@ -27090,7 +27149,7 @@
         </p:nvSpPr>
         <p:spPr>
           <a:xfrm>
-            <a:off x="8138160" y="2633472"/>
+            <a:off x="8138160" y="2596896"/>
             <a:ext cx="109728" cy="109728"/>
           </a:xfrm>
           <a:prstGeom prst="rect">
@@ -27110,7 +27169,7 @@
         </p:nvSpPr>
         <p:spPr>
           <a:xfrm>
-            <a:off x="8366760" y="2459736"/>
+            <a:off x="8366760" y="2423160"/>
             <a:ext cx="3291840" cy="731520"/>
           </a:xfrm>
           <a:prstGeom prst="rect">
@@ -27127,7 +27186,7 @@
               <a:buNone/>
             </a:pPr>
             <a:r>
-              <a:rPr lang="en-US" sz="1350" dirty="0">
+              <a:rPr lang="en-US" sz="1300" dirty="0">
                 <a:solidFill>
                   <a:srgbClr val="263947"/>
                 </a:solidFill>
@@ -27137,7 +27196,7 @@
               </a:rPr>
               <a:t>Also more latency and energy.</a:t>
             </a:r>
-            <a:endParaRPr lang="en-US" sz="1350" dirty="0"/>
+            <a:endParaRPr lang="en-US" sz="1300" dirty="0"/>
           </a:p>
         </p:txBody>
       </p:sp>
@@ -27149,7 +27208,7 @@
         </p:nvSpPr>
         <p:spPr>
           <a:xfrm>
-            <a:off x="8138160" y="3419856"/>
+            <a:off x="8138160" y="3346704"/>
             <a:ext cx="109728" cy="109728"/>
           </a:xfrm>
           <a:prstGeom prst="rect">
@@ -27169,7 +27228,7 @@
         </p:nvSpPr>
         <p:spPr>
           <a:xfrm>
-            <a:off x="8366760" y="3246120"/>
+            <a:off x="8366760" y="3172968"/>
             <a:ext cx="3291840" cy="731520"/>
           </a:xfrm>
           <a:prstGeom prst="rect">
@@ -27186,7 +27245,7 @@
               <a:buNone/>
             </a:pPr>
             <a:r>
-              <a:rPr lang="en-US" sz="1350" dirty="0">
+              <a:rPr lang="en-US" sz="1300" dirty="0">
                 <a:solidFill>
                   <a:srgbClr val="263947"/>
                 </a:solidFill>
@@ -27196,7 +27255,7 @@
               </a:rPr>
               <a:t>Caches help only with reuse.</a:t>
             </a:r>
-            <a:endParaRPr lang="en-US" sz="1350" dirty="0"/>
+            <a:endParaRPr lang="en-US" sz="1300" dirty="0"/>
           </a:p>
         </p:txBody>
       </p:sp>
@@ -27536,7 +27595,7 @@
               <a:buNone/>
             </a:pPr>
             <a:r>
-              <a:rPr lang="en-US" sz="1350" dirty="0">
+              <a:rPr lang="en-US" sz="1300" dirty="0">
                 <a:solidFill>
                   <a:srgbClr val="263947"/>
                 </a:solidFill>
@@ -27546,7 +27605,7 @@
               </a:rPr>
               <a:t>CPU: latency across diverse code.</a:t>
             </a:r>
-            <a:endParaRPr lang="en-US" sz="1350" dirty="0"/>
+            <a:endParaRPr lang="en-US" sz="1300" dirty="0"/>
           </a:p>
         </p:txBody>
       </p:sp>
@@ -27558,7 +27617,7 @@
         </p:nvSpPr>
         <p:spPr>
           <a:xfrm>
-            <a:off x="8138160" y="2633472"/>
+            <a:off x="8138160" y="2596896"/>
             <a:ext cx="109728" cy="109728"/>
           </a:xfrm>
           <a:prstGeom prst="rect">
@@ -27578,7 +27637,7 @@
         </p:nvSpPr>
         <p:spPr>
           <a:xfrm>
-            <a:off x="8366760" y="2459736"/>
+            <a:off x="8366760" y="2423160"/>
             <a:ext cx="3291840" cy="731520"/>
           </a:xfrm>
           <a:prstGeom prst="rect">
@@ -27595,7 +27654,7 @@
               <a:buNone/>
             </a:pPr>
             <a:r>
-              <a:rPr lang="en-US" sz="1350" dirty="0">
+              <a:rPr lang="en-US" sz="1300" dirty="0">
                 <a:solidFill>
                   <a:srgbClr val="263947"/>
                 </a:solidFill>
@@ -27605,7 +27664,7 @@
               </a:rPr>
               <a:t>GPU: throughput across regular work.</a:t>
             </a:r>
-            <a:endParaRPr lang="en-US" sz="1350" dirty="0"/>
+            <a:endParaRPr lang="en-US" sz="1300" dirty="0"/>
           </a:p>
         </p:txBody>
       </p:sp>
@@ -27617,7 +27676,7 @@
         </p:nvSpPr>
         <p:spPr>
           <a:xfrm>
-            <a:off x="8138160" y="3419856"/>
+            <a:off x="8138160" y="3346704"/>
             <a:ext cx="109728" cy="109728"/>
           </a:xfrm>
           <a:prstGeom prst="rect">
@@ -27637,7 +27696,7 @@
         </p:nvSpPr>
         <p:spPr>
           <a:xfrm>
-            <a:off x="8366760" y="3246120"/>
+            <a:off x="8366760" y="3172968"/>
             <a:ext cx="3291840" cy="731520"/>
           </a:xfrm>
           <a:prstGeom prst="rect">
@@ -27654,7 +27713,7 @@
               <a:buNone/>
             </a:pPr>
             <a:r>
-              <a:rPr lang="en-US" sz="1350" dirty="0">
+              <a:rPr lang="en-US" sz="1300" dirty="0">
                 <a:solidFill>
                   <a:srgbClr val="263947"/>
                 </a:solidFill>
@@ -27664,7 +27723,7 @@
               </a:rPr>
               <a:t>Neither wins every phase.</a:t>
             </a:r>
-            <a:endParaRPr lang="en-US" sz="1350" dirty="0"/>
+            <a:endParaRPr lang="en-US" sz="1300" dirty="0"/>
           </a:p>
         </p:txBody>
       </p:sp>
